--- a/Story 2/Story 2 Mei Qi Ng.pptx
+++ b/Story 2/Story 2 Mei Qi Ng.pptx
@@ -237,7 +237,7 @@
           <a:p>
             <a:fld id="{258BFD57-AB0A-470B-A7AF-56DFE7B5174A}" type="datetimeFigureOut">
               <a:rPr lang="en-US" smtClean="0"/>
-              <a:t>9/19/2026</a:t>
+              <a:t>9/28/2026</a:t>
             </a:fld>
             <a:endParaRPr lang="en-US" dirty="0"/>
           </a:p>
@@ -414,7 +414,7 @@
           <a:p>
             <a:fld id="{D4B3339F-6CEA-4641-BE08-40DAFD6FCF25}" type="datetimeFigureOut">
               <a:rPr lang="en-US" smtClean="0"/>
-              <a:t>9/19/2026</a:t>
+              <a:t>9/28/2026</a:t>
             </a:fld>
             <a:endParaRPr lang="en-US" dirty="0"/>
           </a:p>
@@ -732,29 +732,10 @@
             </a:r>
           </a:p>
           <a:p>
-            <a:pPr lvl="0"/>
-            <a:r>
-              <a:rPr lang="en-US" b="0" dirty="0"/>
-              <a:t>Simplicity (Data-Ink Ratio): </a:t>
-            </a:r>
             <a:r>
               <a:rPr lang="en-US" dirty="0"/>
-              <a:t>Removed grey, gridlines and bounding boxes; increased label sizes for readability.</a:t>
+              <a:t>Highlighting/showcase a message. The slides trace the cause-and-effect chain reaction of the federal policy to prove the mandates are contradictory </a:t>
             </a:r>
-          </a:p>
-          <a:p>
-            <a:pPr lvl="0"/>
-            <a:r>
-              <a:rPr lang="en-US" b="0" dirty="0"/>
-              <a:t>Saliency: </a:t>
-            </a:r>
-            <a:r>
-              <a:rPr lang="en-US" dirty="0"/>
-              <a:t>Added targeted vertical lines market to highlight exact moments of Fed policy intervention and events</a:t>
-            </a:r>
-          </a:p>
-          <a:p>
-            <a:endParaRPr lang="en-US" dirty="0"/>
           </a:p>
         </p:txBody>
       </p:sp>
@@ -838,7 +819,10 @@
           <a:bodyPr/>
           <a:lstStyle/>
           <a:p>
-            <a:endParaRPr lang="en-US" dirty="0"/>
+            <a:r>
+              <a:rPr lang="en-US" sz="1200" dirty="0"/>
+              <a:t>A chronological line chart was selected to track the sequence of events over time; to prove rate hikes increase operating costs, which happened before the unemployment spike</a:t>
+            </a:r>
           </a:p>
         </p:txBody>
       </p:sp>
@@ -982,6 +966,34 @@
           <a:bodyPr/>
           <a:lstStyle/>
           <a:p>
+            <a:pPr marL="0" marR="0" lvl="0" indent="0" algn="l" defTabSz="914400" rtl="0" eaLnBrk="1" fontAlgn="auto" latinLnBrk="0" hangingPunct="1">
+              <a:lnSpc>
+                <a:spcPct val="100000"/>
+              </a:lnSpc>
+              <a:spcBef>
+                <a:spcPts val="0"/>
+              </a:spcBef>
+              <a:spcAft>
+                <a:spcPts val="0"/>
+              </a:spcAft>
+              <a:buClrTx/>
+              <a:buSzTx/>
+              <a:buFontTx/>
+              <a:buNone/>
+              <a:tabLst/>
+              <a:defRPr/>
+            </a:pPr>
+            <a:r>
+              <a:rPr lang="en-US" sz="1200" dirty="0">
+                <a:solidFill>
+                  <a:schemeClr val="bg1"/>
+                </a:solidFill>
+                <a:latin typeface="+mn-lt"/>
+              </a:rPr>
+              <a:t>A line chart was used to show the prolonged stability of the dual mandate over a 10 year timeline, revealing the exact point (“liftoff hike”) when the Fed felt the labor market had recovered </a:t>
+            </a:r>
+          </a:p>
+          <a:p>
             <a:endParaRPr lang="en-US" dirty="0"/>
           </a:p>
         </p:txBody>
@@ -1066,6 +1078,29 @@
           <a:bodyPr/>
           <a:lstStyle/>
           <a:p>
+            <a:pPr marL="0" marR="0" lvl="0" indent="0" algn="l" defTabSz="914400" rtl="0" eaLnBrk="1" fontAlgn="auto" latinLnBrk="0" hangingPunct="1">
+              <a:lnSpc>
+                <a:spcPct val="100000"/>
+              </a:lnSpc>
+              <a:spcBef>
+                <a:spcPts val="0"/>
+              </a:spcBef>
+              <a:spcAft>
+                <a:spcPts val="0"/>
+              </a:spcAft>
+              <a:buClrTx/>
+              <a:buSzTx/>
+              <a:buFontTx/>
+              <a:buNone/>
+              <a:tabLst/>
+              <a:defRPr/>
+            </a:pPr>
+            <a:r>
+              <a:rPr lang="en-US" sz="1200" dirty="0"/>
+              <a:t>A line chart was selected to highlight the drastic visual intersection in 2022 where inflation overtakes rates, forcing an aggressive, delayed policy correction.</a:t>
+            </a:r>
+          </a:p>
+          <a:p>
             <a:endParaRPr lang="en-US" dirty="0"/>
           </a:p>
         </p:txBody>
@@ -1151,8 +1186,13 @@
           <a:lstStyle/>
           <a:p>
             <a:r>
-              <a:rPr lang="en-US" dirty="0"/>
-              <a:t>Phillips curve concept (when unemployment is low, inflation goes up and unemployment high inflation goes down)</a:t>
+              <a:rPr lang="en-US" sz="1200" dirty="0">
+                <a:solidFill>
+                  <a:schemeClr val="bg1"/>
+                </a:solidFill>
+                <a:latin typeface="+mn-lt"/>
+              </a:rPr>
+              <a:t>A scatter plot was selected to remove the time axis and map the contradiction between inflation and unemployment ( The Phillips Curve). Color encoding replaces the need for a third axis to show Fed's reaction</a:t>
             </a:r>
           </a:p>
         </p:txBody>
@@ -10078,39 +10118,36 @@
           <a:chExt cx="0" cy="0"/>
         </a:xfrm>
       </p:grpSpPr>
-      <p:sp>
-        <p:nvSpPr>
-          <p:cNvPr id="7" name="Title 6">
+      <p:pic>
+        <p:nvPicPr>
+          <p:cNvPr id="9" name="Picture 8">
             <a:extLst>
               <a:ext uri="{FF2B5EF4-FFF2-40B4-BE49-F238E27FC236}">
-                <a16:creationId xmlns:a16="http://schemas.microsoft.com/office/drawing/2014/main" id="{1A2458FF-0D0C-4ACC-C6FB-103BC0BADCCD}"/>
+                <a16:creationId xmlns:a16="http://schemas.microsoft.com/office/drawing/2014/main" id="{5D3D9A0D-9297-6CAD-E7E7-DE8452FD0BB6}"/>
               </a:ext>
             </a:extLst>
           </p:cNvPr>
-          <p:cNvSpPr>
-            <a:spLocks noGrp="1"/>
-          </p:cNvSpPr>
-          <p:nvPr>
-            <p:ph type="title"/>
-          </p:nvPr>
-        </p:nvSpPr>
+          <p:cNvPicPr>
+            <a:picLocks noChangeAspect="1"/>
+          </p:cNvPicPr>
+          <p:nvPr/>
+        </p:nvPicPr>
+        <p:blipFill>
+          <a:blip r:embed="rId3"/>
+          <a:stretch>
+            <a:fillRect/>
+          </a:stretch>
+        </p:blipFill>
         <p:spPr>
           <a:xfrm>
-            <a:off x="422119" y="125819"/>
-            <a:ext cx="10212658" cy="729669"/>
+            <a:off x="401570" y="295387"/>
+            <a:ext cx="10715067" cy="4587375"/>
           </a:xfrm>
+          <a:prstGeom prst="rect">
+            <a:avLst/>
+          </a:prstGeom>
         </p:spPr>
-        <p:txBody>
-          <a:bodyPr/>
-          <a:lstStyle/>
-          <a:p>
-            <a:r>
-              <a:rPr lang="en-US" dirty="0"/>
-              <a:t>great recession &amp; rate cuts </a:t>
-            </a:r>
-          </a:p>
-        </p:txBody>
-      </p:sp>
+      </p:pic>
       <p:sp>
         <p:nvSpPr>
           <p:cNvPr id="31" name="Text Placeholder 3">
@@ -10129,17 +10166,34 @@
         </p:nvSpPr>
         <p:spPr>
           <a:xfrm>
-            <a:off x="9932250" y="1612702"/>
-            <a:ext cx="2055311" cy="3632595"/>
+            <a:off x="288555" y="4949011"/>
+            <a:ext cx="11362339" cy="1327934"/>
           </a:xfrm>
+          <a:ln>
+            <a:solidFill>
+              <a:srgbClr val="00B0F0"/>
+            </a:solidFill>
+          </a:ln>
+          <a:effectLst>
+            <a:glow rad="63500">
+              <a:schemeClr val="accent1">
+                <a:satMod val="175000"/>
+                <a:alpha val="40000"/>
+              </a:schemeClr>
+            </a:glow>
+          </a:effectLst>
         </p:spPr>
         <p:txBody>
           <a:bodyPr anchor="t"/>
           <a:lstStyle/>
           <a:p>
             <a:r>
-              <a:rPr lang="en-US" sz="1500" dirty="0"/>
-              <a:t>A chronological line chart was selected to track the sequence of events over time; to prove rate hikes increase operating costs, which happened before the unemployment spike</a:t>
+              <a:rPr lang="en-US" sz="2400" b="1" dirty="0"/>
+              <a:t>Core Message:</a:t>
+            </a:r>
+            <a:r>
+              <a:rPr lang="en-US" sz="2400" dirty="0"/>
+              <a:t> Rate hikes increase operating costs with a time lag. The Fed's rate hikes in 2004–2006 triggered a chain reaction, following the 2008 unemployment crash which forced Fed’s to abandon their inflation targets to save jobs</a:t>
             </a:r>
           </a:p>
         </p:txBody>
@@ -10185,96 +10239,6 @@
           </a:p>
         </p:txBody>
       </p:sp>
-      <p:sp>
-        <p:nvSpPr>
-          <p:cNvPr id="3" name="Title 6">
-            <a:extLst>
-              <a:ext uri="{FF2B5EF4-FFF2-40B4-BE49-F238E27FC236}">
-                <a16:creationId xmlns:a16="http://schemas.microsoft.com/office/drawing/2014/main" id="{9DC1D6D2-854B-0E75-2010-DE681260A6CE}"/>
-              </a:ext>
-            </a:extLst>
-          </p:cNvPr>
-          <p:cNvSpPr txBox="1">
-            <a:spLocks/>
-          </p:cNvSpPr>
-          <p:nvPr/>
-        </p:nvSpPr>
-        <p:spPr>
-          <a:xfrm>
-            <a:off x="422118" y="796841"/>
-            <a:ext cx="11769881" cy="729669"/>
-          </a:xfrm>
-          <a:prstGeom prst="rect">
-            <a:avLst/>
-          </a:prstGeom>
-        </p:spPr>
-        <p:txBody>
-          <a:bodyPr vert="horz" lIns="91440" tIns="45720" rIns="91440" bIns="45720" rtlCol="0" anchor="b">
-            <a:noAutofit/>
-          </a:bodyPr>
-          <a:lstStyle>
-            <a:lvl1pPr algn="l" defTabSz="914400" rtl="0" eaLnBrk="1" latinLnBrk="0" hangingPunct="1">
-              <a:lnSpc>
-                <a:spcPct val="90000"/>
-              </a:lnSpc>
-              <a:spcBef>
-                <a:spcPct val="0"/>
-              </a:spcBef>
-              <a:buNone/>
-              <a:defRPr sz="3200" kern="1200" cap="all" spc="300" baseline="0">
-                <a:solidFill>
-                  <a:schemeClr val="accent3">
-                    <a:lumMod val="75000"/>
-                  </a:schemeClr>
-                </a:solidFill>
-                <a:latin typeface="+mj-lt"/>
-                <a:ea typeface="+mj-ea"/>
-                <a:cs typeface="Biome" panose="020B0503030204020804" pitchFamily="34" charset="0"/>
-              </a:defRPr>
-            </a:lvl1pPr>
-          </a:lstStyle>
-          <a:p>
-            <a:r>
-              <a:rPr lang="en-US" sz="2000" dirty="0">
-                <a:solidFill>
-                  <a:schemeClr val="bg1"/>
-                </a:solidFill>
-              </a:rPr>
-              <a:t>Fed cuts rates to zero as unemployment skyrockets, abandoning inflation defense</a:t>
-            </a:r>
-          </a:p>
-        </p:txBody>
-      </p:sp>
-      <p:pic>
-        <p:nvPicPr>
-          <p:cNvPr id="6" name="Picture 5">
-            <a:extLst>
-              <a:ext uri="{FF2B5EF4-FFF2-40B4-BE49-F238E27FC236}">
-                <a16:creationId xmlns:a16="http://schemas.microsoft.com/office/drawing/2014/main" id="{11B4C2A5-3226-EFA0-8E51-BDFAE15052C9}"/>
-              </a:ext>
-            </a:extLst>
-          </p:cNvPr>
-          <p:cNvPicPr>
-            <a:picLocks noChangeAspect="1"/>
-          </p:cNvPicPr>
-          <p:nvPr/>
-        </p:nvPicPr>
-        <p:blipFill>
-          <a:blip r:embed="rId3"/>
-          <a:stretch>
-            <a:fillRect/>
-          </a:stretch>
-        </p:blipFill>
-        <p:spPr>
-          <a:xfrm>
-            <a:off x="465043" y="1526510"/>
-            <a:ext cx="9080401" cy="4902765"/>
-          </a:xfrm>
-          <a:prstGeom prst="rect">
-            <a:avLst/>
-          </a:prstGeom>
-        </p:spPr>
-      </p:pic>
     </p:spTree>
     <p:extLst>
       <p:ext uri="{BB962C8B-B14F-4D97-AF65-F5344CB8AC3E}">
@@ -10307,41 +10271,6 @@
       </p:grpSpPr>
       <p:sp>
         <p:nvSpPr>
-          <p:cNvPr id="2" name="Title 1">
-            <a:extLst>
-              <a:ext uri="{FF2B5EF4-FFF2-40B4-BE49-F238E27FC236}">
-                <a16:creationId xmlns:a16="http://schemas.microsoft.com/office/drawing/2014/main" id="{D543EB8B-0AB9-7554-AEEA-E8D744959E9A}"/>
-              </a:ext>
-            </a:extLst>
-          </p:cNvPr>
-          <p:cNvSpPr>
-            <a:spLocks noGrp="1"/>
-          </p:cNvSpPr>
-          <p:nvPr>
-            <p:ph type="title"/>
-          </p:nvPr>
-        </p:nvSpPr>
-        <p:spPr>
-          <a:xfrm>
-            <a:off x="343860" y="288029"/>
-            <a:ext cx="9681086" cy="655698"/>
-          </a:xfrm>
-        </p:spPr>
-        <p:txBody>
-          <a:bodyPr/>
-          <a:lstStyle/>
-          <a:p>
-            <a:pPr lvl="0"/>
-            <a:r>
-              <a:rPr lang="en-US" dirty="0"/>
-              <a:t>Long Recovery (2010–2019)</a:t>
-            </a:r>
-            <a:endParaRPr lang="en-US" noProof="0" dirty="0"/>
-          </a:p>
-        </p:txBody>
-      </p:sp>
-      <p:sp>
-        <p:nvSpPr>
           <p:cNvPr id="4" name="Slide Number Placeholder 3">
             <a:extLst>
               <a:ext uri="{FF2B5EF4-FFF2-40B4-BE49-F238E27FC236}">
@@ -10375,96 +10304,6 @@
           </a:p>
         </p:txBody>
       </p:sp>
-      <p:sp>
-        <p:nvSpPr>
-          <p:cNvPr id="9" name="Title 6">
-            <a:extLst>
-              <a:ext uri="{FF2B5EF4-FFF2-40B4-BE49-F238E27FC236}">
-                <a16:creationId xmlns:a16="http://schemas.microsoft.com/office/drawing/2014/main" id="{53399800-422E-CCDD-86CE-8FA2B916A070}"/>
-              </a:ext>
-            </a:extLst>
-          </p:cNvPr>
-          <p:cNvSpPr txBox="1">
-            <a:spLocks/>
-          </p:cNvSpPr>
-          <p:nvPr/>
-        </p:nvSpPr>
-        <p:spPr>
-          <a:xfrm>
-            <a:off x="343860" y="796841"/>
-            <a:ext cx="11299717" cy="729669"/>
-          </a:xfrm>
-          <a:prstGeom prst="rect">
-            <a:avLst/>
-          </a:prstGeom>
-        </p:spPr>
-        <p:txBody>
-          <a:bodyPr vert="horz" lIns="91440" tIns="45720" rIns="91440" bIns="45720" rtlCol="0" anchor="b">
-            <a:noAutofit/>
-          </a:bodyPr>
-          <a:lstStyle>
-            <a:lvl1pPr algn="l" defTabSz="914400" rtl="0" eaLnBrk="1" latinLnBrk="0" hangingPunct="1">
-              <a:lnSpc>
-                <a:spcPct val="90000"/>
-              </a:lnSpc>
-              <a:spcBef>
-                <a:spcPct val="0"/>
-              </a:spcBef>
-              <a:buNone/>
-              <a:defRPr sz="3200" kern="1200" cap="all" spc="300" baseline="0">
-                <a:solidFill>
-                  <a:schemeClr val="accent3">
-                    <a:lumMod val="75000"/>
-                  </a:schemeClr>
-                </a:solidFill>
-                <a:latin typeface="+mj-lt"/>
-                <a:ea typeface="+mj-ea"/>
-                <a:cs typeface="Biome" panose="020B0503030204020804" pitchFamily="34" charset="0"/>
-              </a:defRPr>
-            </a:lvl1pPr>
-          </a:lstStyle>
-          <a:p>
-            <a:r>
-              <a:rPr lang="en-US" sz="2000" dirty="0">
-                <a:solidFill>
-                  <a:schemeClr val="bg1"/>
-                </a:solidFill>
-              </a:rPr>
-              <a:t>A decade of near-zero rates achieves full employment without triggering inflation.</a:t>
-            </a:r>
-          </a:p>
-        </p:txBody>
-      </p:sp>
-      <p:pic>
-        <p:nvPicPr>
-          <p:cNvPr id="11" name="Picture 10">
-            <a:extLst>
-              <a:ext uri="{FF2B5EF4-FFF2-40B4-BE49-F238E27FC236}">
-                <a16:creationId xmlns:a16="http://schemas.microsoft.com/office/drawing/2014/main" id="{6E68CA6D-18A9-1B2C-2418-A7F3D2C5609C}"/>
-              </a:ext>
-            </a:extLst>
-          </p:cNvPr>
-          <p:cNvPicPr>
-            <a:picLocks noChangeAspect="1"/>
-          </p:cNvPicPr>
-          <p:nvPr/>
-        </p:nvPicPr>
-        <p:blipFill>
-          <a:blip r:embed="rId3"/>
-          <a:stretch>
-            <a:fillRect/>
-          </a:stretch>
-        </p:blipFill>
-        <p:spPr>
-          <a:xfrm>
-            <a:off x="343859" y="1698552"/>
-            <a:ext cx="9499221" cy="4527645"/>
-          </a:xfrm>
-          <a:prstGeom prst="rect">
-            <a:avLst/>
-          </a:prstGeom>
-        </p:spPr>
-      </p:pic>
       <p:sp>
         <p:nvSpPr>
           <p:cNvPr id="13" name="TextBox 12">
@@ -10508,10 +10347,10 @@
       </p:sp>
       <p:sp>
         <p:nvSpPr>
-          <p:cNvPr id="19" name="Text Placeholder 3">
+          <p:cNvPr id="3" name="Text Placeholder 3">
             <a:extLst>
               <a:ext uri="{FF2B5EF4-FFF2-40B4-BE49-F238E27FC236}">
-                <a16:creationId xmlns:a16="http://schemas.microsoft.com/office/drawing/2014/main" id="{DAD5E094-CD20-2E57-FA85-8D6E3726BF31}"/>
+                <a16:creationId xmlns:a16="http://schemas.microsoft.com/office/drawing/2014/main" id="{3DE18546-E8E0-0FFE-5153-0D66AD1AEE05}"/>
               </a:ext>
             </a:extLst>
           </p:cNvPr>
@@ -10522,12 +10361,25 @@
         </p:nvSpPr>
         <p:spPr>
           <a:xfrm>
-            <a:off x="10024946" y="3760216"/>
-            <a:ext cx="2133724" cy="3632595"/>
+            <a:off x="288555" y="5123569"/>
+            <a:ext cx="11362339" cy="1327934"/>
           </a:xfrm>
           <a:prstGeom prst="rect">
             <a:avLst/>
           </a:prstGeom>
+          <a:ln>
+            <a:solidFill>
+              <a:srgbClr val="00B0F0"/>
+            </a:solidFill>
+          </a:ln>
+          <a:effectLst>
+            <a:glow rad="63500">
+              <a:schemeClr val="accent1">
+                <a:satMod val="175000"/>
+                <a:alpha val="40000"/>
+              </a:schemeClr>
+            </a:glow>
+          </a:effectLst>
         </p:spPr>
         <p:txBody>
           <a:bodyPr anchor="t"/>
@@ -10709,17 +10561,56 @@
           </a:lstStyle>
           <a:p>
             <a:r>
-              <a:rPr lang="en-US" sz="1500" dirty="0">
+              <a:rPr lang="en-US" sz="2400" b="1" dirty="0">
                 <a:solidFill>
                   <a:schemeClr val="bg1"/>
                 </a:solidFill>
                 <a:latin typeface="+mn-lt"/>
               </a:rPr>
-              <a:t>A line chart was used to show the prolonged stability of the dual mandate over a 10 year timeline, revealing the exact point (“liftoff hike”) when the Fed felt the labor market had recovered </a:t>
+              <a:t>Core Message:</a:t>
+            </a:r>
+            <a:r>
+              <a:rPr lang="en-US" sz="2400" dirty="0">
+                <a:solidFill>
+                  <a:schemeClr val="bg1"/>
+                </a:solidFill>
+                <a:latin typeface="+mn-lt"/>
+              </a:rPr>
+              <a:t> Max employment and stable 2% inflation can coexist, but the data shows it required almost a decade of zero-interest-rate policy and an absence of major economic shocks to achieve this balance.</a:t>
             </a:r>
           </a:p>
         </p:txBody>
       </p:sp>
+      <p:pic>
+        <p:nvPicPr>
+          <p:cNvPr id="8" name="Picture 7">
+            <a:extLst>
+              <a:ext uri="{FF2B5EF4-FFF2-40B4-BE49-F238E27FC236}">
+                <a16:creationId xmlns:a16="http://schemas.microsoft.com/office/drawing/2014/main" id="{9C61AD7C-A692-9D30-4989-97EED89DAEFC}"/>
+              </a:ext>
+            </a:extLst>
+          </p:cNvPr>
+          <p:cNvPicPr>
+            <a:picLocks noChangeAspect="1"/>
+          </p:cNvPicPr>
+          <p:nvPr/>
+        </p:nvPicPr>
+        <p:blipFill>
+          <a:blip r:embed="rId3"/>
+          <a:stretch>
+            <a:fillRect/>
+          </a:stretch>
+        </p:blipFill>
+        <p:spPr>
+          <a:xfrm>
+            <a:off x="288555" y="104019"/>
+            <a:ext cx="10766438" cy="4844992"/>
+          </a:xfrm>
+          <a:prstGeom prst="rect">
+            <a:avLst/>
+          </a:prstGeom>
+        </p:spPr>
+      </p:pic>
     </p:spTree>
     <p:extLst>
       <p:ext uri="{BB962C8B-B14F-4D97-AF65-F5344CB8AC3E}">
@@ -10752,72 +10643,6 @@
       </p:grpSpPr>
       <p:sp>
         <p:nvSpPr>
-          <p:cNvPr id="2" name="Title 1">
-            <a:extLst>
-              <a:ext uri="{FF2B5EF4-FFF2-40B4-BE49-F238E27FC236}">
-                <a16:creationId xmlns:a16="http://schemas.microsoft.com/office/drawing/2014/main" id="{11883E06-8BEA-1DD3-D0D6-391C08880EBF}"/>
-              </a:ext>
-            </a:extLst>
-          </p:cNvPr>
-          <p:cNvSpPr>
-            <a:spLocks noGrp="1"/>
-          </p:cNvSpPr>
-          <p:nvPr>
-            <p:ph type="title"/>
-          </p:nvPr>
-        </p:nvSpPr>
-        <p:spPr>
-          <a:xfrm>
-            <a:off x="584454" y="468443"/>
-            <a:ext cx="10500989" cy="653923"/>
-          </a:xfrm>
-        </p:spPr>
-        <p:txBody>
-          <a:bodyPr/>
-          <a:lstStyle/>
-          <a:p>
-            <a:r>
-              <a:rPr lang="en-US" dirty="0"/>
-              <a:t>Pandemic Disruption</a:t>
-            </a:r>
-          </a:p>
-        </p:txBody>
-      </p:sp>
-      <p:sp>
-        <p:nvSpPr>
-          <p:cNvPr id="4" name="Content Placeholder 3">
-            <a:extLst>
-              <a:ext uri="{FF2B5EF4-FFF2-40B4-BE49-F238E27FC236}">
-                <a16:creationId xmlns:a16="http://schemas.microsoft.com/office/drawing/2014/main" id="{3770D91C-D5C0-248C-26D3-DE7C7C72E632}"/>
-              </a:ext>
-            </a:extLst>
-          </p:cNvPr>
-          <p:cNvSpPr>
-            <a:spLocks noGrp="1"/>
-          </p:cNvSpPr>
-          <p:nvPr>
-            <p:ph sz="quarter" idx="36"/>
-          </p:nvPr>
-        </p:nvSpPr>
-        <p:spPr>
-          <a:xfrm>
-            <a:off x="9668107" y="2157290"/>
-            <a:ext cx="1976006" cy="3398819"/>
-          </a:xfrm>
-        </p:spPr>
-        <p:txBody>
-          <a:bodyPr/>
-          <a:lstStyle/>
-          <a:p>
-            <a:r>
-              <a:rPr lang="en-US" sz="1500" dirty="0"/>
-              <a:t>A line chart was selected to highlight the drastic visual intersection in 2022 where inflation overtakes rates, forcing an aggressive, delayed policy correction.</a:t>
-            </a:r>
-          </a:p>
-        </p:txBody>
-      </p:sp>
-      <p:sp>
-        <p:nvSpPr>
           <p:cNvPr id="5" name="Slide Number Placeholder 4">
             <a:extLst>
               <a:ext uri="{FF2B5EF4-FFF2-40B4-BE49-F238E27FC236}">
@@ -10892,340 +10717,12 @@
           </a:p>
         </p:txBody>
       </p:sp>
-      <p:sp>
-        <p:nvSpPr>
-          <p:cNvPr id="9" name="Title 6">
+      <p:pic>
+        <p:nvPicPr>
+          <p:cNvPr id="17" name="Picture 16">
             <a:extLst>
               <a:ext uri="{FF2B5EF4-FFF2-40B4-BE49-F238E27FC236}">
-                <a16:creationId xmlns:a16="http://schemas.microsoft.com/office/drawing/2014/main" id="{1EC849D0-4AA1-E4A3-6844-C74531CDA6DB}"/>
-              </a:ext>
-            </a:extLst>
-          </p:cNvPr>
-          <p:cNvSpPr txBox="1">
-            <a:spLocks/>
-          </p:cNvSpPr>
-          <p:nvPr/>
-        </p:nvSpPr>
-        <p:spPr>
-          <a:xfrm>
-            <a:off x="584454" y="757532"/>
-            <a:ext cx="11299717" cy="729669"/>
-          </a:xfrm>
-          <a:prstGeom prst="rect">
-            <a:avLst/>
-          </a:prstGeom>
-        </p:spPr>
-        <p:txBody>
-          <a:bodyPr vert="horz" lIns="91440" tIns="45720" rIns="91440" bIns="45720" rtlCol="0" anchor="b">
-            <a:noAutofit/>
-          </a:bodyPr>
-          <a:lstStyle>
-            <a:lvl1pPr algn="l" defTabSz="914400" rtl="0" eaLnBrk="1" latinLnBrk="0" hangingPunct="1">
-              <a:lnSpc>
-                <a:spcPct val="90000"/>
-              </a:lnSpc>
-              <a:spcBef>
-                <a:spcPct val="0"/>
-              </a:spcBef>
-              <a:buNone/>
-              <a:defRPr sz="3200" kern="1200" cap="all" spc="300" baseline="0">
-                <a:solidFill>
-                  <a:schemeClr val="accent3">
-                    <a:lumMod val="75000"/>
-                  </a:schemeClr>
-                </a:solidFill>
-                <a:latin typeface="+mj-lt"/>
-                <a:ea typeface="+mj-ea"/>
-                <a:cs typeface="Biome" panose="020B0503030204020804" pitchFamily="34" charset="0"/>
-              </a:defRPr>
-            </a:lvl1pPr>
-          </a:lstStyle>
-          <a:p>
-            <a:r>
-              <a:rPr lang="en-US" sz="2000" dirty="0">
-                <a:solidFill>
-                  <a:schemeClr val="bg1"/>
-                </a:solidFill>
-              </a:rPr>
-              <a:t>the fastest rate hikes CAUSED BY 40 YEAR long HIGH inflation </a:t>
-            </a:r>
-          </a:p>
-        </p:txBody>
-      </p:sp>
-      <p:pic>
-        <p:nvPicPr>
-          <p:cNvPr id="13" name="Content Placeholder 12">
-            <a:extLst>
-              <a:ext uri="{FF2B5EF4-FFF2-40B4-BE49-F238E27FC236}">
-                <a16:creationId xmlns:a16="http://schemas.microsoft.com/office/drawing/2014/main" id="{66B1B89C-1F78-2C56-6C9B-3B0A28DDAC4C}"/>
-              </a:ext>
-            </a:extLst>
-          </p:cNvPr>
-          <p:cNvPicPr>
-            <a:picLocks noGrp="1" noChangeAspect="1"/>
-          </p:cNvPicPr>
-          <p:nvPr>
-            <p:ph sz="quarter" idx="35"/>
-          </p:nvPr>
-        </p:nvPicPr>
-        <p:blipFill>
-          <a:blip r:embed="rId3"/>
-          <a:stretch>
-            <a:fillRect/>
-          </a:stretch>
-        </p:blipFill>
-        <p:spPr>
-          <a:xfrm>
-            <a:off x="686670" y="1565290"/>
-            <a:ext cx="8803018" cy="4660908"/>
-          </a:xfrm>
-          <a:prstGeom prst="rect">
-            <a:avLst/>
-          </a:prstGeom>
-        </p:spPr>
-      </p:pic>
-    </p:spTree>
-    <p:extLst>
-      <p:ext uri="{BB962C8B-B14F-4D97-AF65-F5344CB8AC3E}">
-        <p14:creationId xmlns:p14="http://schemas.microsoft.com/office/powerpoint/2010/main" val="2728059627"/>
-      </p:ext>
-    </p:extLst>
-  </p:cSld>
-  <p:clrMapOvr>
-    <a:masterClrMapping/>
-  </p:clrMapOvr>
-</p:sld>
-</file>
-
-<file path=ppt/slides/slide5.xml><?xml version="1.0" encoding="utf-8"?>
-<p:sld xmlns:a="http://schemas.openxmlformats.org/drawingml/2006/main" xmlns:r="http://schemas.openxmlformats.org/officeDocument/2006/relationships" xmlns:p="http://schemas.openxmlformats.org/presentationml/2006/main">
-  <p:cSld>
-    <p:spTree>
-      <p:nvGrpSpPr>
-        <p:cNvPr id="1" name=""/>
-        <p:cNvGrpSpPr/>
-        <p:nvPr/>
-      </p:nvGrpSpPr>
-      <p:grpSpPr>
-        <a:xfrm>
-          <a:off x="0" y="0"/>
-          <a:ext cx="0" cy="0"/>
-          <a:chOff x="0" y="0"/>
-          <a:chExt cx="0" cy="0"/>
-        </a:xfrm>
-      </p:grpSpPr>
-      <p:sp>
-        <p:nvSpPr>
-          <p:cNvPr id="3" name="Slide Number Placeholder 2">
-            <a:extLst>
-              <a:ext uri="{FF2B5EF4-FFF2-40B4-BE49-F238E27FC236}">
-                <a16:creationId xmlns:a16="http://schemas.microsoft.com/office/drawing/2014/main" id="{A6A971A9-0C5C-DDFC-67F9-2E5A55F12F67}"/>
-              </a:ext>
-            </a:extLst>
-          </p:cNvPr>
-          <p:cNvSpPr>
-            <a:spLocks noGrp="1"/>
-          </p:cNvSpPr>
-          <p:nvPr>
-            <p:ph type="sldNum" sz="quarter" idx="12"/>
-          </p:nvPr>
-        </p:nvSpPr>
-        <p:spPr>
-          <a:xfrm>
-            <a:off x="9140971" y="6226198"/>
-            <a:ext cx="2743200" cy="365125"/>
-          </a:xfrm>
-        </p:spPr>
-        <p:txBody>
-          <a:bodyPr/>
-          <a:lstStyle/>
-          <a:p>
-            <a:fld id="{FE024F78-56A6-7740-B68D-8D4D026EDF3F}" type="slidenum">
-              <a:rPr lang="en-US" smtClean="0"/>
-              <a:pPr/>
-              <a:t>5</a:t>
-            </a:fld>
-            <a:endParaRPr lang="en-US" dirty="0"/>
-          </a:p>
-        </p:txBody>
-      </p:sp>
-      <p:sp>
-        <p:nvSpPr>
-          <p:cNvPr id="6" name="TextBox 5">
-            <a:extLst>
-              <a:ext uri="{FF2B5EF4-FFF2-40B4-BE49-F238E27FC236}">
-                <a16:creationId xmlns:a16="http://schemas.microsoft.com/office/drawing/2014/main" id="{435C79D4-DA20-AD29-EC00-9A5A49FE717B}"/>
-              </a:ext>
-            </a:extLst>
-          </p:cNvPr>
-          <p:cNvSpPr txBox="1"/>
-          <p:nvPr/>
-        </p:nvSpPr>
-        <p:spPr>
-          <a:xfrm>
-            <a:off x="0" y="6611779"/>
-            <a:ext cx="8971280" cy="246221"/>
-          </a:xfrm>
-          <a:prstGeom prst="rect">
-            <a:avLst/>
-          </a:prstGeom>
-          <a:noFill/>
-        </p:spPr>
-        <p:txBody>
-          <a:bodyPr wrap="square" rtlCol="0">
-            <a:spAutoFit/>
-          </a:bodyPr>
-          <a:lstStyle/>
-          <a:p>
-            <a:r>
-              <a:rPr lang="en-US" sz="1000" dirty="0">
-                <a:solidFill>
-                  <a:schemeClr val="bg1">
-                    <a:lumMod val="75000"/>
-                  </a:schemeClr>
-                </a:solidFill>
-              </a:rPr>
-              <a:t>Date Source: Federal Reserve Economic Data (FRED) API; Bureau of Labor Statistics; Federal Reserve Board.</a:t>
-            </a:r>
-          </a:p>
-        </p:txBody>
-      </p:sp>
-      <p:sp>
-        <p:nvSpPr>
-          <p:cNvPr id="7" name="Title 1">
-            <a:extLst>
-              <a:ext uri="{FF2B5EF4-FFF2-40B4-BE49-F238E27FC236}">
-                <a16:creationId xmlns:a16="http://schemas.microsoft.com/office/drawing/2014/main" id="{5008814C-1857-0E17-CB44-C18637F38791}"/>
-              </a:ext>
-            </a:extLst>
-          </p:cNvPr>
-          <p:cNvSpPr txBox="1">
-            <a:spLocks/>
-          </p:cNvSpPr>
-          <p:nvPr/>
-        </p:nvSpPr>
-        <p:spPr>
-          <a:xfrm>
-            <a:off x="0" y="-133088"/>
-            <a:ext cx="11725617" cy="1043762"/>
-          </a:xfrm>
-          <a:prstGeom prst="rect">
-            <a:avLst/>
-          </a:prstGeom>
-        </p:spPr>
-        <p:txBody>
-          <a:bodyPr vert="horz" lIns="91440" tIns="45720" rIns="91440" bIns="45720" rtlCol="0" anchor="b">
-            <a:noAutofit/>
-          </a:bodyPr>
-          <a:lstStyle>
-            <a:lvl1pPr algn="ctr" defTabSz="914400" rtl="0" eaLnBrk="1" latinLnBrk="0" hangingPunct="1">
-              <a:lnSpc>
-                <a:spcPct val="90000"/>
-              </a:lnSpc>
-              <a:spcBef>
-                <a:spcPct val="0"/>
-              </a:spcBef>
-              <a:buNone/>
-              <a:defRPr sz="3200" kern="1200" cap="all" spc="300" baseline="0">
-                <a:solidFill>
-                  <a:schemeClr val="bg1"/>
-                </a:solidFill>
-                <a:latin typeface="+mj-lt"/>
-                <a:ea typeface="+mj-ea"/>
-                <a:cs typeface="Biome" panose="020B0503030204020804" pitchFamily="34" charset="0"/>
-              </a:defRPr>
-            </a:lvl1pPr>
-          </a:lstStyle>
-          <a:p>
-            <a:r>
-              <a:rPr lang="en-US" dirty="0">
-                <a:solidFill>
-                  <a:schemeClr val="accent3">
-                    <a:lumMod val="75000"/>
-                  </a:schemeClr>
-                </a:solidFill>
-              </a:rPr>
-              <a:t> Trade-off: Mapping the Contradiction</a:t>
-            </a:r>
-          </a:p>
-        </p:txBody>
-      </p:sp>
-      <p:sp>
-        <p:nvSpPr>
-          <p:cNvPr id="9" name="Title 6">
-            <a:extLst>
-              <a:ext uri="{FF2B5EF4-FFF2-40B4-BE49-F238E27FC236}">
-                <a16:creationId xmlns:a16="http://schemas.microsoft.com/office/drawing/2014/main" id="{9F2DD69B-900C-BE19-D387-6FC9E3F3010C}"/>
-              </a:ext>
-            </a:extLst>
-          </p:cNvPr>
-          <p:cNvSpPr txBox="1">
-            <a:spLocks/>
-          </p:cNvSpPr>
-          <p:nvPr/>
-        </p:nvSpPr>
-        <p:spPr>
-          <a:xfrm>
-            <a:off x="8887523" y="1330465"/>
-            <a:ext cx="2996648" cy="1906859"/>
-          </a:xfrm>
-          <a:prstGeom prst="rect">
-            <a:avLst/>
-          </a:prstGeom>
-        </p:spPr>
-        <p:txBody>
-          <a:bodyPr vert="horz" lIns="91440" tIns="45720" rIns="91440" bIns="45720" rtlCol="0" anchor="b">
-            <a:noAutofit/>
-          </a:bodyPr>
-          <a:lstStyle>
-            <a:lvl1pPr algn="l" defTabSz="914400" rtl="0" eaLnBrk="1" latinLnBrk="0" hangingPunct="1">
-              <a:lnSpc>
-                <a:spcPct val="90000"/>
-              </a:lnSpc>
-              <a:spcBef>
-                <a:spcPct val="0"/>
-              </a:spcBef>
-              <a:buNone/>
-              <a:defRPr sz="3200" kern="1200" cap="all" spc="300" baseline="0">
-                <a:solidFill>
-                  <a:schemeClr val="accent3">
-                    <a:lumMod val="75000"/>
-                  </a:schemeClr>
-                </a:solidFill>
-                <a:latin typeface="+mj-lt"/>
-                <a:ea typeface="+mj-ea"/>
-                <a:cs typeface="Biome" panose="020B0503030204020804" pitchFamily="34" charset="0"/>
-              </a:defRPr>
-            </a:lvl1pPr>
-          </a:lstStyle>
-          <a:p>
-            <a:r>
-              <a:rPr lang="en-US" sz="2000" dirty="0">
-                <a:solidFill>
-                  <a:schemeClr val="bg1"/>
-                </a:solidFill>
-              </a:rPr>
-              <a:t>economy rarely sits in the "Target Bullseye" </a:t>
-            </a:r>
-          </a:p>
-          <a:p>
-            <a:r>
-              <a:rPr lang="en-US" sz="2000" dirty="0">
-                <a:solidFill>
-                  <a:schemeClr val="bg1"/>
-                </a:solidFill>
-              </a:rPr>
-              <a:t>(2% Inflation, 4% Unemployment)</a:t>
-            </a:r>
-          </a:p>
-        </p:txBody>
-      </p:sp>
-      <p:pic>
-        <p:nvPicPr>
-          <p:cNvPr id="15" name="Picture 14">
-            <a:extLst>
-              <a:ext uri="{FF2B5EF4-FFF2-40B4-BE49-F238E27FC236}">
-                <a16:creationId xmlns:a16="http://schemas.microsoft.com/office/drawing/2014/main" id="{A4B48172-4922-9FD8-0A0B-FF04D96E349E}"/>
+                <a16:creationId xmlns:a16="http://schemas.microsoft.com/office/drawing/2014/main" id="{39107584-F18B-1E0B-D50F-E9B0CCD559DD}"/>
               </a:ext>
             </a:extLst>
           </p:cNvPr>
@@ -11242,8 +10739,8 @@
         </p:blipFill>
         <p:spPr>
           <a:xfrm>
-            <a:off x="466383" y="995928"/>
-            <a:ext cx="8331929" cy="5530596"/>
+            <a:off x="674872" y="335616"/>
+            <a:ext cx="10842256" cy="4867081"/>
           </a:xfrm>
           <a:prstGeom prst="rect">
             <a:avLst/>
@@ -11252,10 +10749,10 @@
       </p:pic>
       <p:sp>
         <p:nvSpPr>
-          <p:cNvPr id="16" name="Text Placeholder 3">
+          <p:cNvPr id="20" name="Text Placeholder 3">
             <a:extLst>
               <a:ext uri="{FF2B5EF4-FFF2-40B4-BE49-F238E27FC236}">
-                <a16:creationId xmlns:a16="http://schemas.microsoft.com/office/drawing/2014/main" id="{682E315A-87DE-9C45-E94A-9AACC7D6DB9A}"/>
+                <a16:creationId xmlns:a16="http://schemas.microsoft.com/office/drawing/2014/main" id="{B95797A1-0B52-135A-959F-CD69EADFEC77}"/>
               </a:ext>
             </a:extLst>
           </p:cNvPr>
@@ -11266,12 +10763,25 @@
         </p:nvSpPr>
         <p:spPr>
           <a:xfrm>
-            <a:off x="8971280" y="3950018"/>
-            <a:ext cx="2648291" cy="2276179"/>
+            <a:off x="414831" y="5243271"/>
+            <a:ext cx="11469340" cy="1167803"/>
           </a:xfrm>
           <a:prstGeom prst="rect">
             <a:avLst/>
           </a:prstGeom>
+          <a:ln>
+            <a:solidFill>
+              <a:srgbClr val="00B0F0"/>
+            </a:solidFill>
+          </a:ln>
+          <a:effectLst>
+            <a:glow rad="63500">
+              <a:schemeClr val="accent1">
+                <a:satMod val="175000"/>
+                <a:alpha val="40000"/>
+              </a:schemeClr>
+            </a:glow>
+          </a:effectLst>
         </p:spPr>
         <p:txBody>
           <a:bodyPr anchor="t"/>
@@ -11453,17 +10963,417 @@
           </a:lstStyle>
           <a:p>
             <a:r>
-              <a:rPr lang="en-US" sz="1500" dirty="0">
+              <a:rPr lang="en-US" sz="2400" b="1" dirty="0">
                 <a:solidFill>
                   <a:schemeClr val="bg1"/>
                 </a:solidFill>
                 <a:latin typeface="+mn-lt"/>
               </a:rPr>
-              <a:t>A scatter plot was selected to remove the time axis and map the contradiction between inflation and unemployment ( The Phillips Curve). Color encoding replaces the need for a third axis to show Fed's reaction</a:t>
+              <a:t>Core Message</a:t>
+            </a:r>
+            <a:r>
+              <a:rPr lang="en-US" sz="2400" dirty="0">
+                <a:solidFill>
+                  <a:schemeClr val="bg1"/>
+                </a:solidFill>
+                <a:latin typeface="+mn-lt"/>
+              </a:rPr>
+              <a:t>: The intersection of the line in 2022 proves the contradiction: to crush 40 year long inflation, the Fed was forced to spike borrowing costs which risks higher unemployment</a:t>
             </a:r>
           </a:p>
         </p:txBody>
       </p:sp>
+    </p:spTree>
+    <p:extLst>
+      <p:ext uri="{BB962C8B-B14F-4D97-AF65-F5344CB8AC3E}">
+        <p14:creationId xmlns:p14="http://schemas.microsoft.com/office/powerpoint/2010/main" val="2728059627"/>
+      </p:ext>
+    </p:extLst>
+  </p:cSld>
+  <p:clrMapOvr>
+    <a:masterClrMapping/>
+  </p:clrMapOvr>
+</p:sld>
+</file>
+
+<file path=ppt/slides/slide5.xml><?xml version="1.0" encoding="utf-8"?>
+<p:sld xmlns:a="http://schemas.openxmlformats.org/drawingml/2006/main" xmlns:r="http://schemas.openxmlformats.org/officeDocument/2006/relationships" xmlns:p="http://schemas.openxmlformats.org/presentationml/2006/main">
+  <p:cSld>
+    <p:spTree>
+      <p:nvGrpSpPr>
+        <p:cNvPr id="1" name=""/>
+        <p:cNvGrpSpPr/>
+        <p:nvPr/>
+      </p:nvGrpSpPr>
+      <p:grpSpPr>
+        <a:xfrm>
+          <a:off x="0" y="0"/>
+          <a:ext cx="0" cy="0"/>
+          <a:chOff x="0" y="0"/>
+          <a:chExt cx="0" cy="0"/>
+        </a:xfrm>
+      </p:grpSpPr>
+      <p:sp>
+        <p:nvSpPr>
+          <p:cNvPr id="3" name="Slide Number Placeholder 2">
+            <a:extLst>
+              <a:ext uri="{FF2B5EF4-FFF2-40B4-BE49-F238E27FC236}">
+                <a16:creationId xmlns:a16="http://schemas.microsoft.com/office/drawing/2014/main" id="{A6A971A9-0C5C-DDFC-67F9-2E5A55F12F67}"/>
+              </a:ext>
+            </a:extLst>
+          </p:cNvPr>
+          <p:cNvSpPr>
+            <a:spLocks noGrp="1"/>
+          </p:cNvSpPr>
+          <p:nvPr>
+            <p:ph type="sldNum" sz="quarter" idx="12"/>
+          </p:nvPr>
+        </p:nvSpPr>
+        <p:spPr>
+          <a:xfrm>
+            <a:off x="9140971" y="6226198"/>
+            <a:ext cx="2743200" cy="365125"/>
+          </a:xfrm>
+        </p:spPr>
+        <p:txBody>
+          <a:bodyPr/>
+          <a:lstStyle/>
+          <a:p>
+            <a:fld id="{FE024F78-56A6-7740-B68D-8D4D026EDF3F}" type="slidenum">
+              <a:rPr lang="en-US" smtClean="0"/>
+              <a:pPr/>
+              <a:t>5</a:t>
+            </a:fld>
+            <a:endParaRPr lang="en-US" dirty="0"/>
+          </a:p>
+        </p:txBody>
+      </p:sp>
+      <p:sp>
+        <p:nvSpPr>
+          <p:cNvPr id="6" name="TextBox 5">
+            <a:extLst>
+              <a:ext uri="{FF2B5EF4-FFF2-40B4-BE49-F238E27FC236}">
+                <a16:creationId xmlns:a16="http://schemas.microsoft.com/office/drawing/2014/main" id="{435C79D4-DA20-AD29-EC00-9A5A49FE717B}"/>
+              </a:ext>
+            </a:extLst>
+          </p:cNvPr>
+          <p:cNvSpPr txBox="1"/>
+          <p:nvPr/>
+        </p:nvSpPr>
+        <p:spPr>
+          <a:xfrm>
+            <a:off x="0" y="6611779"/>
+            <a:ext cx="8971280" cy="246221"/>
+          </a:xfrm>
+          <a:prstGeom prst="rect">
+            <a:avLst/>
+          </a:prstGeom>
+          <a:noFill/>
+        </p:spPr>
+        <p:txBody>
+          <a:bodyPr wrap="square" rtlCol="0">
+            <a:spAutoFit/>
+          </a:bodyPr>
+          <a:lstStyle/>
+          <a:p>
+            <a:r>
+              <a:rPr lang="en-US" sz="1000" dirty="0">
+                <a:solidFill>
+                  <a:schemeClr val="bg1">
+                    <a:lumMod val="75000"/>
+                  </a:schemeClr>
+                </a:solidFill>
+              </a:rPr>
+              <a:t>Date Source: Federal Reserve Economic Data (FRED) API; Bureau of Labor Statistics; Federal Reserve Board.</a:t>
+            </a:r>
+          </a:p>
+        </p:txBody>
+      </p:sp>
+      <p:sp>
+        <p:nvSpPr>
+          <p:cNvPr id="4" name="Text Placeholder 3">
+            <a:extLst>
+              <a:ext uri="{FF2B5EF4-FFF2-40B4-BE49-F238E27FC236}">
+                <a16:creationId xmlns:a16="http://schemas.microsoft.com/office/drawing/2014/main" id="{20350583-427B-7A1B-1046-ECDA7F6D79E7}"/>
+              </a:ext>
+            </a:extLst>
+          </p:cNvPr>
+          <p:cNvSpPr txBox="1">
+            <a:spLocks/>
+          </p:cNvSpPr>
+          <p:nvPr/>
+        </p:nvSpPr>
+        <p:spPr>
+          <a:xfrm>
+            <a:off x="9349483" y="752722"/>
+            <a:ext cx="2534688" cy="4867241"/>
+          </a:xfrm>
+          <a:prstGeom prst="rect">
+            <a:avLst/>
+          </a:prstGeom>
+          <a:ln>
+            <a:solidFill>
+              <a:srgbClr val="00B0F0"/>
+            </a:solidFill>
+          </a:ln>
+          <a:effectLst>
+            <a:glow rad="63500">
+              <a:schemeClr val="accent1">
+                <a:satMod val="175000"/>
+                <a:alpha val="40000"/>
+              </a:schemeClr>
+            </a:glow>
+          </a:effectLst>
+        </p:spPr>
+        <p:txBody>
+          <a:bodyPr anchor="t"/>
+          <a:lstStyle>
+            <a:lvl1pPr marL="0" indent="0" algn="l" defTabSz="914400" rtl="0" eaLnBrk="1" latinLnBrk="0" hangingPunct="1">
+              <a:lnSpc>
+                <a:spcPct val="90000"/>
+              </a:lnSpc>
+              <a:spcBef>
+                <a:spcPts val="1000"/>
+              </a:spcBef>
+              <a:buFont typeface="Arial" panose="020B0604020202020204" pitchFamily="34" charset="0"/>
+              <a:buNone/>
+              <a:defRPr sz="2800" kern="1200">
+                <a:solidFill>
+                  <a:schemeClr val="accent3"/>
+                </a:solidFill>
+                <a:latin typeface="+mj-lt"/>
+                <a:ea typeface="+mn-ea"/>
+                <a:cs typeface="Biome" panose="020B0503030204020804" pitchFamily="34" charset="0"/>
+              </a:defRPr>
+            </a:lvl1pPr>
+            <a:lvl2pPr marL="800100" indent="-342900" algn="l" defTabSz="914400" rtl="0" eaLnBrk="1" latinLnBrk="0" hangingPunct="1">
+              <a:lnSpc>
+                <a:spcPct val="90000"/>
+              </a:lnSpc>
+              <a:spcBef>
+                <a:spcPts val="500"/>
+              </a:spcBef>
+              <a:buClr>
+                <a:schemeClr val="accent6"/>
+              </a:buClr>
+              <a:buFont typeface="Arial" panose="020B0604020202020204" pitchFamily="34" charset="0"/>
+              <a:buChar char="•"/>
+              <a:defRPr sz="2400" kern="1200">
+                <a:solidFill>
+                  <a:schemeClr val="bg1"/>
+                </a:solidFill>
+                <a:latin typeface="+mn-lt"/>
+                <a:ea typeface="+mn-ea"/>
+                <a:cs typeface="+mn-cs"/>
+              </a:defRPr>
+            </a:lvl2pPr>
+            <a:lvl3pPr marL="1257300" indent="-342900" algn="l" defTabSz="914400" rtl="0" eaLnBrk="1" latinLnBrk="0" hangingPunct="1">
+              <a:lnSpc>
+                <a:spcPct val="90000"/>
+              </a:lnSpc>
+              <a:spcBef>
+                <a:spcPts val="500"/>
+              </a:spcBef>
+              <a:buClr>
+                <a:schemeClr val="accent6"/>
+              </a:buClr>
+              <a:buFont typeface="Arial" panose="020B0604020202020204" pitchFamily="34" charset="0"/>
+              <a:buChar char="•"/>
+              <a:defRPr sz="2000" kern="1200">
+                <a:solidFill>
+                  <a:schemeClr val="bg1"/>
+                </a:solidFill>
+                <a:latin typeface="+mn-lt"/>
+                <a:ea typeface="+mn-ea"/>
+                <a:cs typeface="+mn-cs"/>
+              </a:defRPr>
+            </a:lvl3pPr>
+            <a:lvl4pPr marL="1657350" indent="-285750" algn="l" defTabSz="914400" rtl="0" eaLnBrk="1" latinLnBrk="0" hangingPunct="1">
+              <a:lnSpc>
+                <a:spcPct val="90000"/>
+              </a:lnSpc>
+              <a:spcBef>
+                <a:spcPts val="500"/>
+              </a:spcBef>
+              <a:buClr>
+                <a:schemeClr val="accent6"/>
+              </a:buClr>
+              <a:buFont typeface="Arial" panose="020B0604020202020204" pitchFamily="34" charset="0"/>
+              <a:buChar char="•"/>
+              <a:defRPr sz="1800" kern="1200">
+                <a:solidFill>
+                  <a:schemeClr val="bg1"/>
+                </a:solidFill>
+                <a:latin typeface="+mn-lt"/>
+                <a:ea typeface="+mn-ea"/>
+                <a:cs typeface="+mn-cs"/>
+              </a:defRPr>
+            </a:lvl4pPr>
+            <a:lvl5pPr marL="2114550" indent="-285750" algn="l" defTabSz="914400" rtl="0" eaLnBrk="1" latinLnBrk="0" hangingPunct="1">
+              <a:lnSpc>
+                <a:spcPct val="90000"/>
+              </a:lnSpc>
+              <a:spcBef>
+                <a:spcPts val="500"/>
+              </a:spcBef>
+              <a:buClr>
+                <a:schemeClr val="accent6"/>
+              </a:buClr>
+              <a:buFont typeface="Arial" panose="020B0604020202020204" pitchFamily="34" charset="0"/>
+              <a:buChar char="•"/>
+              <a:defRPr sz="1800" kern="1200">
+                <a:solidFill>
+                  <a:schemeClr val="bg1"/>
+                </a:solidFill>
+                <a:latin typeface="+mn-lt"/>
+                <a:ea typeface="+mn-ea"/>
+                <a:cs typeface="+mn-cs"/>
+              </a:defRPr>
+            </a:lvl5pPr>
+            <a:lvl6pPr marL="2514600" indent="-228600" algn="l" defTabSz="914400" rtl="0" eaLnBrk="1" latinLnBrk="0" hangingPunct="1">
+              <a:lnSpc>
+                <a:spcPct val="90000"/>
+              </a:lnSpc>
+              <a:spcBef>
+                <a:spcPts val="500"/>
+              </a:spcBef>
+              <a:buFont typeface="Arial" panose="020B0604020202020204" pitchFamily="34" charset="0"/>
+              <a:buChar char="•"/>
+              <a:defRPr sz="1800" kern="1200">
+                <a:solidFill>
+                  <a:schemeClr val="tx1"/>
+                </a:solidFill>
+                <a:latin typeface="+mn-lt"/>
+                <a:ea typeface="+mn-ea"/>
+                <a:cs typeface="+mn-cs"/>
+              </a:defRPr>
+            </a:lvl6pPr>
+            <a:lvl7pPr marL="2971800" indent="-228600" algn="l" defTabSz="914400" rtl="0" eaLnBrk="1" latinLnBrk="0" hangingPunct="1">
+              <a:lnSpc>
+                <a:spcPct val="90000"/>
+              </a:lnSpc>
+              <a:spcBef>
+                <a:spcPts val="500"/>
+              </a:spcBef>
+              <a:buFont typeface="Arial" panose="020B0604020202020204" pitchFamily="34" charset="0"/>
+              <a:buChar char="•"/>
+              <a:defRPr sz="1800" kern="1200">
+                <a:solidFill>
+                  <a:schemeClr val="tx1"/>
+                </a:solidFill>
+                <a:latin typeface="+mn-lt"/>
+                <a:ea typeface="+mn-ea"/>
+                <a:cs typeface="+mn-cs"/>
+              </a:defRPr>
+            </a:lvl7pPr>
+            <a:lvl8pPr marL="3429000" indent="-228600" algn="l" defTabSz="914400" rtl="0" eaLnBrk="1" latinLnBrk="0" hangingPunct="1">
+              <a:lnSpc>
+                <a:spcPct val="90000"/>
+              </a:lnSpc>
+              <a:spcBef>
+                <a:spcPts val="500"/>
+              </a:spcBef>
+              <a:buFont typeface="Arial" panose="020B0604020202020204" pitchFamily="34" charset="0"/>
+              <a:buChar char="•"/>
+              <a:defRPr sz="1800" kern="1200">
+                <a:solidFill>
+                  <a:schemeClr val="tx1"/>
+                </a:solidFill>
+                <a:latin typeface="+mn-lt"/>
+                <a:ea typeface="+mn-ea"/>
+                <a:cs typeface="+mn-cs"/>
+              </a:defRPr>
+            </a:lvl8pPr>
+            <a:lvl9pPr marL="3886200" indent="-228600" algn="l" defTabSz="914400" rtl="0" eaLnBrk="1" latinLnBrk="0" hangingPunct="1">
+              <a:lnSpc>
+                <a:spcPct val="90000"/>
+              </a:lnSpc>
+              <a:spcBef>
+                <a:spcPts val="500"/>
+              </a:spcBef>
+              <a:buFont typeface="Arial" panose="020B0604020202020204" pitchFamily="34" charset="0"/>
+              <a:buChar char="•"/>
+              <a:defRPr sz="1800" kern="1200">
+                <a:solidFill>
+                  <a:schemeClr val="tx1"/>
+                </a:solidFill>
+                <a:latin typeface="+mn-lt"/>
+                <a:ea typeface="+mn-ea"/>
+                <a:cs typeface="+mn-cs"/>
+              </a:defRPr>
+            </a:lvl9pPr>
+          </a:lstStyle>
+          <a:p>
+            <a:r>
+              <a:rPr lang="en-US" sz="2400" b="1" dirty="0">
+                <a:solidFill>
+                  <a:schemeClr val="bg1"/>
+                </a:solidFill>
+                <a:latin typeface="+mn-lt"/>
+              </a:rPr>
+              <a:t>Core Message: E</a:t>
+            </a:r>
+            <a:r>
+              <a:rPr lang="en-US" sz="2400" dirty="0">
+                <a:solidFill>
+                  <a:schemeClr val="bg1"/>
+                </a:solidFill>
+                <a:latin typeface="+mn-lt"/>
+              </a:rPr>
+              <a:t>conomy never rests in the "Target Bullseye“ </a:t>
+            </a:r>
+          </a:p>
+          <a:p>
+            <a:endParaRPr lang="en-US" sz="2400" dirty="0">
+              <a:solidFill>
+                <a:schemeClr val="bg1"/>
+              </a:solidFill>
+              <a:latin typeface="+mn-lt"/>
+            </a:endParaRPr>
+          </a:p>
+          <a:p>
+            <a:r>
+              <a:rPr lang="en-US" sz="2400" dirty="0">
+                <a:solidFill>
+                  <a:schemeClr val="bg1"/>
+                </a:solidFill>
+                <a:latin typeface="+mn-lt"/>
+              </a:rPr>
+              <a:t>Over 25 years, fixing 1 crisis always needed applying interest-rate pressure that disrupts the other side of the mandate</a:t>
+            </a:r>
+          </a:p>
+        </p:txBody>
+      </p:sp>
+      <p:pic>
+        <p:nvPicPr>
+          <p:cNvPr id="8" name="Picture 7">
+            <a:extLst>
+              <a:ext uri="{FF2B5EF4-FFF2-40B4-BE49-F238E27FC236}">
+                <a16:creationId xmlns:a16="http://schemas.microsoft.com/office/drawing/2014/main" id="{84B3A437-E4A2-AC37-3C18-4322847650B3}"/>
+              </a:ext>
+            </a:extLst>
+          </p:cNvPr>
+          <p:cNvPicPr>
+            <a:picLocks noChangeAspect="1"/>
+          </p:cNvPicPr>
+          <p:nvPr/>
+        </p:nvPicPr>
+        <p:blipFill>
+          <a:blip r:embed="rId3"/>
+          <a:stretch>
+            <a:fillRect/>
+          </a:stretch>
+        </p:blipFill>
+        <p:spPr>
+          <a:xfrm>
+            <a:off x="146930" y="202511"/>
+            <a:ext cx="9117708" cy="6023686"/>
+          </a:xfrm>
+          <a:prstGeom prst="rect">
+            <a:avLst/>
+          </a:prstGeom>
+        </p:spPr>
+      </p:pic>
     </p:spTree>
     <p:extLst>
       <p:ext uri="{BB962C8B-B14F-4D97-AF65-F5344CB8AC3E}">
@@ -12489,6 +12399,15 @@
 </file>
 
 <file path=customXml/item1.xml><?xml version="1.0" encoding="utf-8"?>
+<?mso-contentType ?>
+<FormTemplates xmlns="http://schemas.microsoft.com/sharepoint/v3/contenttype/forms">
+  <Display>DocumentLibraryForm</Display>
+  <Edit>DocumentLibraryForm</Edit>
+  <New>DocumentLibraryForm</New>
+</FormTemplates>
+</file>
+
+<file path=customXml/item2.xml><?xml version="1.0" encoding="utf-8"?>
 <p:properties xmlns:p="http://schemas.microsoft.com/office/2006/metadata/properties" xmlns:xsi="http://www.w3.org/2001/XMLSchema-instance" xmlns:pc="http://schemas.microsoft.com/office/infopath/2007/PartnerControls">
   <documentManagement>
     <_ip_UnifiedCompliancePolicyUIAction xmlns="http://schemas.microsoft.com/sharepoint/v3" xsi:nil="true"/>
@@ -12506,15 +12425,6 @@
     <MediaServiceKeyPoints xmlns="71af3243-3dd4-4a8d-8c0d-dd76da1f02a5" xsi:nil="true"/>
   </documentManagement>
 </p:properties>
-</file>
-
-<file path=customXml/item2.xml><?xml version="1.0" encoding="utf-8"?>
-<?mso-contentType ?>
-<FormTemplates xmlns="http://schemas.microsoft.com/sharepoint/v3/contenttype/forms">
-  <Display>DocumentLibraryForm</Display>
-  <Edit>DocumentLibraryForm</Edit>
-  <New>DocumentLibraryForm</New>
-</FormTemplates>
 </file>
 
 <file path=customXml/item3.xml><?xml version="1.0" encoding="utf-8"?>
@@ -12830,6 +12740,14 @@
 </file>
 
 <file path=customXml/itemProps1.xml><?xml version="1.0" encoding="utf-8"?>
+<ds:datastoreItem xmlns:ds="http://schemas.openxmlformats.org/officeDocument/2006/customXml" ds:itemID="{44137456-21FC-4AE2-8A94-BF06CAF2EB9B}">
+  <ds:schemaRefs>
+    <ds:schemaRef ds:uri="http://schemas.microsoft.com/sharepoint/v3/contenttype/forms"/>
+  </ds:schemaRefs>
+</ds:datastoreItem>
+</file>
+
+<file path=customXml/itemProps2.xml><?xml version="1.0" encoding="utf-8"?>
 <ds:datastoreItem xmlns:ds="http://schemas.openxmlformats.org/officeDocument/2006/customXml" ds:itemID="{E305301E-11B3-4B9D-A588-21F3C9809371}">
   <ds:schemaRefs>
     <ds:schemaRef ds:uri="http://schemas.microsoft.com/office/2006/metadata/properties"/>
@@ -12837,14 +12755,6 @@
     <ds:schemaRef ds:uri="http://schemas.microsoft.com/sharepoint/v3"/>
     <ds:schemaRef ds:uri="71af3243-3dd4-4a8d-8c0d-dd76da1f02a5"/>
     <ds:schemaRef ds:uri="230e9df3-be65-4c73-a93b-d1236ebd677e"/>
-  </ds:schemaRefs>
-</ds:datastoreItem>
-</file>
-
-<file path=customXml/itemProps2.xml><?xml version="1.0" encoding="utf-8"?>
-<ds:datastoreItem xmlns:ds="http://schemas.openxmlformats.org/officeDocument/2006/customXml" ds:itemID="{44137456-21FC-4AE2-8A94-BF06CAF2EB9B}">
-  <ds:schemaRefs>
-    <ds:schemaRef ds:uri="http://schemas.microsoft.com/sharepoint/v3/contenttype/forms"/>
   </ds:schemaRefs>
 </ds:datastoreItem>
 </file>
